--- a/納品レポート/ホテル別レポート/コンフォートホテル成田_口コミ分析レポート.pptx
+++ b/納品レポート/ホテル別レポート/コンフォートホテル成田_口コミ分析レポート.pptx
@@ -2703,7 +2703,7 @@
                 <a:ea typeface="Arial" pitchFamily="34" charset="-122"/>
                 <a:cs typeface="Arial" pitchFamily="34" charset="-120"/>
               </a:rPr>
-              <a:t>分析対象期間：2025年12月〜2026年3月</a:t>
+              <a:t>分析対象期間：2025年12月〜2026年4月</a:t>
             </a:r>
             <a:endParaRPr lang="en-US" sz="1000" dirty="0"/>
           </a:p>
@@ -2743,7 +2743,7 @@
                 <a:ea typeface="Arial" pitchFamily="34" charset="-122"/>
                 <a:cs typeface="Arial" pitchFamily="34" charset="-120"/>
               </a:rPr>
-              <a:t>作成日：2026年4月3日</a:t>
+              <a:t>作成日：2026年4月12日</a:t>
             </a:r>
             <a:endParaRPr lang="en-US" sz="1000" dirty="0"/>
           </a:p>
@@ -2922,7 +2922,7 @@
                 <a:ea typeface="Arial" pitchFamily="34" charset="-122"/>
                 <a:cs typeface="Arial" pitchFamily="34" charset="-120"/>
               </a:rPr>
-              <a:t>コンフォートホテル成田の2025年12月〜2026年3月口コミ分析（73件）では、総合評価8.56点（10pt換算）、高評価率83.6%という結果が得られました。</a:t>
+              <a:t>コンフォートホテル成田の2025年12月〜2026年4月口コミ分析（73件）では、総合評価8.56点（10pt換算）、高評価率83.6%という結果が得られました。</a:t>
             </a:r>
             <a:endParaRPr lang="en-US" sz="1200" dirty="0"/>
           </a:p>
